--- a/Rapport_Capstone_SpaceX.pptx
+++ b/Rapport_Capstone_SpaceX.pptx
@@ -153,7 +153,7 @@
   <p:extLst>
     <p:ext uri="{521415D9-36F7-43E2-AB2F-B90AF26B5E84}">
       <p14:sectionLst xmlns:p14="http://schemas.microsoft.com/office/powerpoint/2010/main">
-        <p14:section name="Introduction" id="{6458af87-dbcc-a296-896b-ca11b254b261}">
+        <p14:section name="Introduction" id="{3521c993-3e24-62b1-eb33-027cb1339662}">
           <p14:sldIdLst>
             <p14:sldId id="256"/>
             <p14:sldId id="257"/>
@@ -161,7 +161,7 @@
             <p14:sldId id="259"/>
           </p14:sldIdLst>
         </p14:section>
-        <p14:section name="Méthodologie" id="{3f77c225-4dcd-3402-6904-4e6c672d7078}">
+        <p14:section name="Méthodologie" id="{72361e73-cb4a-1645-13a4-45865be5b83d}">
           <p14:sldIdLst>
             <p14:sldId id="260"/>
             <p14:sldId id="261"/>
@@ -176,7 +176,7 @@
             <p14:sldId id="270"/>
           </p14:sldIdLst>
         </p14:section>
-        <p14:section name="Résultats de l'EDA" id="{8c66e503-fe6c-d362-6321-a8ba303c2b38}">
+        <p14:section name="Résultats de l'EDA" id="{8ec082db-971b-857f-2f13-33ca2eeb531a}">
           <p14:sldIdLst>
             <p14:sldId id="271"/>
             <p14:sldId id="272"/>
@@ -197,7 +197,7 @@
             <p14:sldId id="287"/>
           </p14:sldIdLst>
         </p14:section>
-        <p14:section name="Analyse de proximité" id="{51ed6f28-7c93-c45b-d2a6-64976836d7e8}">
+        <p14:section name="Analyse de proximité" id="{12f60f8c-7a5b-c9a9-285c-75d3576751a5}">
           <p14:sldIdLst>
             <p14:sldId id="288"/>
             <p14:sldId id="289"/>
@@ -205,7 +205,7 @@
             <p14:sldId id="291"/>
           </p14:sldIdLst>
         </p14:section>
-        <p14:section name="Dashboard" id="{82dbdc19-bac0-6b27-9c1b-64f5f2b65f9a}">
+        <p14:section name="Dashboard" id="{766b53fe-3a4c-27e6-8ee0-f42621fad057}">
           <p14:sldIdLst>
             <p14:sldId id="292"/>
             <p14:sldId id="293"/>
@@ -213,19 +213,19 @@
             <p14:sldId id="295"/>
           </p14:sldIdLst>
         </p14:section>
-        <p14:section name="Analyse prédictive" id="{9b2f345f-f638-0b89-9b2c-c76f91730207}">
+        <p14:section name="Analyse prédictive" id="{7ed29add-b318-73ce-c388-115240c64c09}">
           <p14:sldIdLst>
             <p14:sldId id="296"/>
             <p14:sldId id="297"/>
             <p14:sldId id="298"/>
           </p14:sldIdLst>
         </p14:section>
-        <p14:section name="Conclusion" id="{01de8989-d9bd-eac4-b753-fce67471c57e}">
+        <p14:section name="Conclusion" id="{b34aadef-5733-6825-2ab8-27d25616f2c3}">
           <p14:sldIdLst>
             <p14:sldId id="299"/>
           </p14:sldIdLst>
         </p14:section>
-        <p14:section name="Annexe" id="{600575f5-e2c4-2a9a-6650-27eeed95cc44}">
+        <p14:section name="Annexe" id="{431dfbc9-7e8c-d1da-f380-7529ee9c9f30}">
           <p14:sldIdLst>
             <p14:sldId id="300"/>
             <p14:sldId id="301"/>
@@ -7870,7 +7870,7 @@
                   </a:extLst>
                 </a:hlinkClick>
               </a:rPr>
-              <a:t>https://github.com/VOTRE-NOM/spacex-capstone/blob/main/edadataviz.ipynb</a:t>
+              <a:t>https://github.com/vanessapenda/Spacex-Capstone/blob/main/edadataviz.ipynb</a:t>
             </a:r>
             <a:endParaRPr lang="en-US" sz="1200" dirty="0"/>
           </a:p>
@@ -9380,7 +9380,7 @@
                   </a:extLst>
                 </a:hlinkClick>
               </a:rPr>
-              <a:t>https://github.com/VOTRE-NOM/spacex-capstone/blob/main/jupyter-labs-eda-sql-coursera_sqllite.ipynb</a:t>
+              <a:t>https://github.com/vanessapenda/Spacex-Capstone/blob/main/jupyter-labs-eda-sql-coursera_sqllite.ipynb</a:t>
             </a:r>
             <a:endParaRPr lang="en-US" sz="1200" dirty="0"/>
           </a:p>
@@ -10801,7 +10801,7 @@
                   </a:extLst>
                 </a:hlinkClick>
               </a:rPr>
-              <a:t>https://github.com/VOTRE-NOM/spacex-capstone/blob/main/lab_jupyter_launch_site_location.ipynb</a:t>
+              <a:t>https://github.com/vanessapenda/Spacex-Capstone/blob/main/lab_jupyter_launch_site_location.ipynb</a:t>
             </a:r>
             <a:endParaRPr lang="en-US" sz="1200" dirty="0"/>
           </a:p>
@@ -11769,7 +11769,7 @@
                   </a:extLst>
                 </a:hlinkClick>
               </a:rPr>
-              <a:t>https://github.com/VOTRE-NOM/spacex-capstone/blob/main/spacex-dash-app.py</a:t>
+              <a:t>https://github.com/vanessapenda/Spacex-Capstone/blob/main/spacex-dash-app.py</a:t>
             </a:r>
             <a:endParaRPr lang="en-US" sz="1200" dirty="0"/>
           </a:p>
@@ -12911,7 +12911,7 @@
                   </a:extLst>
                 </a:hlinkClick>
               </a:rPr>
-              <a:t>https://github.com/VOTRE-NOM/spacex-capstone/blob/main/SpaceX_Machine_Learning_Prediction_Part_5.ipynb</a:t>
+              <a:t>https://github.com/vanessapenda/Spacex-Capstone/blob/main/SpaceX_Machine_Learning_Prediction_Part_5.ipynb</a:t>
             </a:r>
             <a:endParaRPr lang="en-US" sz="1200" dirty="0"/>
           </a:p>
@@ -36601,7 +36601,7 @@
                   </a:extLst>
                 </a:hlinkClick>
               </a:rPr>
-              <a:t>https://github.com/VOTRE-NOM/spacex-capstone/blob/main/SpaceX_Machine_Learning_Prediction_Part_5.ipynb</a:t>
+              <a:t>https://github.com/vanessapenda/Spacex-Capstone/blob/main/SpaceX_Machine_Learning_Prediction_Part_5.ipynb</a:t>
             </a:r>
             <a:endParaRPr lang="en-US" sz="1200" dirty="0"/>
           </a:p>
@@ -38667,7 +38667,7 @@
                   </a:extLst>
                 </a:hlinkClick>
               </a:rPr>
-              <a:t>https://github.com/VOTRE-NOM/spacex-capstone/blob/main/jupyter-labs-spacex-data-collection-api.ipynb</a:t>
+              <a:t>https://github.com/vanessapenda/Spacex-Capstone/blob/main/jupyter-labs-spacex-data-collection-api.ipynb</a:t>
             </a:r>
             <a:endParaRPr lang="en-US" sz="1200" dirty="0"/>
           </a:p>
@@ -39764,7 +39764,7 @@
                   </a:extLst>
                 </a:hlinkClick>
               </a:rPr>
-              <a:t>https://github.com/VOTRE-NOM/spacex-capstone/blob/main/jupyter-labs-webscraping.ipynb</a:t>
+              <a:t>https://github.com/vanessapenda/Spacex-Capstone/blob/main/jupyter-labs-webscraping.ipynb</a:t>
             </a:r>
             <a:endParaRPr lang="en-US" sz="1200" dirty="0"/>
           </a:p>
@@ -42526,7 +42526,7 @@
                   </a:extLst>
                 </a:hlinkClick>
               </a:rPr>
-              <a:t>https://github.com/VOTRE-NOM/spacex-capstone/blob/main/labs-jupyter-spacex-data-wrangling.ipynb</a:t>
+              <a:t>https://github.com/vanessapenda/Spacex-Capstone/blob/main/labs-jupyter-spacex-data-wrangling.ipynb</a:t>
             </a:r>
             <a:endParaRPr lang="en-US" sz="1200" dirty="0"/>
           </a:p>
